--- a/SMART INDIA HACKATHON aquamind.pptx
+++ b/SMART INDIA HACKATHON aquamind.pptx
@@ -202,7 +202,7 @@
           <a:p>
             <a:fld id="{E1D5A15D-757B-4511-A9A4-C187C9A7AEED}" type="datetimeFigureOut">
               <a:rPr lang="en-IN" smtClean="0"/>
-              <a:t>02-09-2026</a:t>
+              <a:t>25-09-2026</a:t>
             </a:fld>
             <a:endParaRPr lang="en-IN"/>
           </a:p>
@@ -266,35 +266,35 @@
           <a:p>
             <a:pPr lvl="0"/>
             <a:r>
-              <a:rPr lang="en-US" smtClean="0"/>
+              <a:rPr lang="en-US"/>
               <a:t>Click to edit Master text styles</a:t>
             </a:r>
           </a:p>
           <a:p>
             <a:pPr lvl="1"/>
             <a:r>
-              <a:rPr lang="en-US" smtClean="0"/>
+              <a:rPr lang="en-US"/>
               <a:t>Second level</a:t>
             </a:r>
           </a:p>
           <a:p>
             <a:pPr lvl="2"/>
             <a:r>
-              <a:rPr lang="en-US" smtClean="0"/>
+              <a:rPr lang="en-US"/>
               <a:t>Third level</a:t>
             </a:r>
           </a:p>
           <a:p>
             <a:pPr lvl="3"/>
             <a:r>
-              <a:rPr lang="en-US" smtClean="0"/>
+              <a:rPr lang="en-US"/>
               <a:t>Fourth level</a:t>
             </a:r>
           </a:p>
           <a:p>
             <a:pPr lvl="4"/>
             <a:r>
-              <a:rPr lang="en-US" smtClean="0"/>
+              <a:rPr lang="en-US"/>
               <a:t>Fifth level</a:t>
             </a:r>
             <a:endParaRPr lang="en-IN"/>
@@ -512,7 +512,7 @@
           </a:lstStyle>
           <a:p>
             <a:r>
-              <a:rPr lang="en-US" smtClean="0"/>
+              <a:rPr lang="en-US"/>
               <a:t>Click to edit Master title style</a:t>
             </a:r>
             <a:endParaRPr lang="en-IN"/>
@@ -577,7 +577,7 @@
           </a:lstStyle>
           <a:p>
             <a:r>
-              <a:rPr lang="en-US" smtClean="0"/>
+              <a:rPr lang="en-US"/>
               <a:t>Click to edit Master subtitle style</a:t>
             </a:r>
             <a:endParaRPr lang="en-IN"/>
@@ -601,7 +601,7 @@
           <a:p>
             <a:fld id="{C755B7AF-CEAB-43A8-A757-209304369108}" type="datetimeFigureOut">
               <a:rPr lang="en-IN" smtClean="0"/>
-              <a:t>02-09-2026</a:t>
+              <a:t>25-09-2026</a:t>
             </a:fld>
             <a:endParaRPr lang="en-IN"/>
           </a:p>
@@ -695,7 +695,7 @@
           <a:lstStyle/>
           <a:p>
             <a:r>
-              <a:rPr lang="en-US" smtClean="0"/>
+              <a:rPr lang="en-US"/>
               <a:t>Click to edit Master title style</a:t>
             </a:r>
             <a:endParaRPr lang="en-IN"/>
@@ -719,35 +719,35 @@
           <a:p>
             <a:pPr lvl="0"/>
             <a:r>
-              <a:rPr lang="en-US" smtClean="0"/>
+              <a:rPr lang="en-US"/>
               <a:t>Click to edit Master text styles</a:t>
             </a:r>
           </a:p>
           <a:p>
             <a:pPr lvl="1"/>
             <a:r>
-              <a:rPr lang="en-US" smtClean="0"/>
+              <a:rPr lang="en-US"/>
               <a:t>Second level</a:t>
             </a:r>
           </a:p>
           <a:p>
             <a:pPr lvl="2"/>
             <a:r>
-              <a:rPr lang="en-US" smtClean="0"/>
+              <a:rPr lang="en-US"/>
               <a:t>Third level</a:t>
             </a:r>
           </a:p>
           <a:p>
             <a:pPr lvl="3"/>
             <a:r>
-              <a:rPr lang="en-US" smtClean="0"/>
+              <a:rPr lang="en-US"/>
               <a:t>Fourth level</a:t>
             </a:r>
           </a:p>
           <a:p>
             <a:pPr lvl="4"/>
             <a:r>
-              <a:rPr lang="en-US" smtClean="0"/>
+              <a:rPr lang="en-US"/>
               <a:t>Fifth level</a:t>
             </a:r>
             <a:endParaRPr lang="en-IN"/>
@@ -771,7 +771,7 @@
           <a:p>
             <a:fld id="{C755B7AF-CEAB-43A8-A757-209304369108}" type="datetimeFigureOut">
               <a:rPr lang="en-IN" smtClean="0"/>
-              <a:t>02-09-2026</a:t>
+              <a:t>25-09-2026</a:t>
             </a:fld>
             <a:endParaRPr lang="en-IN"/>
           </a:p>
@@ -870,7 +870,7 @@
           <a:lstStyle/>
           <a:p>
             <a:r>
-              <a:rPr lang="en-US" smtClean="0"/>
+              <a:rPr lang="en-US"/>
               <a:t>Click to edit Master title style</a:t>
             </a:r>
             <a:endParaRPr lang="en-IN"/>
@@ -899,35 +899,35 @@
           <a:p>
             <a:pPr lvl="0"/>
             <a:r>
-              <a:rPr lang="en-US" smtClean="0"/>
+              <a:rPr lang="en-US"/>
               <a:t>Click to edit Master text styles</a:t>
             </a:r>
           </a:p>
           <a:p>
             <a:pPr lvl="1"/>
             <a:r>
-              <a:rPr lang="en-US" smtClean="0"/>
+              <a:rPr lang="en-US"/>
               <a:t>Second level</a:t>
             </a:r>
           </a:p>
           <a:p>
             <a:pPr lvl="2"/>
             <a:r>
-              <a:rPr lang="en-US" smtClean="0"/>
+              <a:rPr lang="en-US"/>
               <a:t>Third level</a:t>
             </a:r>
           </a:p>
           <a:p>
             <a:pPr lvl="3"/>
             <a:r>
-              <a:rPr lang="en-US" smtClean="0"/>
+              <a:rPr lang="en-US"/>
               <a:t>Fourth level</a:t>
             </a:r>
           </a:p>
           <a:p>
             <a:pPr lvl="4"/>
             <a:r>
-              <a:rPr lang="en-US" smtClean="0"/>
+              <a:rPr lang="en-US"/>
               <a:t>Fifth level</a:t>
             </a:r>
             <a:endParaRPr lang="en-IN"/>
@@ -951,7 +951,7 @@
           <a:p>
             <a:fld id="{C755B7AF-CEAB-43A8-A757-209304369108}" type="datetimeFigureOut">
               <a:rPr lang="en-IN" smtClean="0"/>
-              <a:t>02-09-2026</a:t>
+              <a:t>25-09-2026</a:t>
             </a:fld>
             <a:endParaRPr lang="en-IN"/>
           </a:p>
@@ -1045,7 +1045,7 @@
           <a:lstStyle/>
           <a:p>
             <a:r>
-              <a:rPr lang="en-US" smtClean="0"/>
+              <a:rPr lang="en-US"/>
               <a:t>Click to edit Master title style</a:t>
             </a:r>
             <a:endParaRPr lang="en-IN"/>
@@ -1069,35 +1069,35 @@
           <a:p>
             <a:pPr lvl="0"/>
             <a:r>
-              <a:rPr lang="en-US" smtClean="0"/>
+              <a:rPr lang="en-US"/>
               <a:t>Click to edit Master text styles</a:t>
             </a:r>
           </a:p>
           <a:p>
             <a:pPr lvl="1"/>
             <a:r>
-              <a:rPr lang="en-US" smtClean="0"/>
+              <a:rPr lang="en-US"/>
               <a:t>Second level</a:t>
             </a:r>
           </a:p>
           <a:p>
             <a:pPr lvl="2"/>
             <a:r>
-              <a:rPr lang="en-US" smtClean="0"/>
+              <a:rPr lang="en-US"/>
               <a:t>Third level</a:t>
             </a:r>
           </a:p>
           <a:p>
             <a:pPr lvl="3"/>
             <a:r>
-              <a:rPr lang="en-US" smtClean="0"/>
+              <a:rPr lang="en-US"/>
               <a:t>Fourth level</a:t>
             </a:r>
           </a:p>
           <a:p>
             <a:pPr lvl="4"/>
             <a:r>
-              <a:rPr lang="en-US" smtClean="0"/>
+              <a:rPr lang="en-US"/>
               <a:t>Fifth level</a:t>
             </a:r>
             <a:endParaRPr lang="en-IN"/>
@@ -1121,7 +1121,7 @@
           <a:p>
             <a:fld id="{C755B7AF-CEAB-43A8-A757-209304369108}" type="datetimeFigureOut">
               <a:rPr lang="en-IN" smtClean="0"/>
-              <a:t>02-09-2026</a:t>
+              <a:t>25-09-2026</a:t>
             </a:fld>
             <a:endParaRPr lang="en-IN"/>
           </a:p>
@@ -1224,7 +1224,7 @@
           </a:lstStyle>
           <a:p>
             <a:r>
-              <a:rPr lang="en-US" smtClean="0"/>
+              <a:rPr lang="en-US"/>
               <a:t>Click to edit Master title style</a:t>
             </a:r>
             <a:endParaRPr lang="en-IN"/>
@@ -1344,7 +1344,7 @@
           <a:p>
             <a:pPr lvl="0"/>
             <a:r>
-              <a:rPr lang="en-US" smtClean="0"/>
+              <a:rPr lang="en-US"/>
               <a:t>Click to edit Master text styles</a:t>
             </a:r>
           </a:p>
@@ -1367,7 +1367,7 @@
           <a:p>
             <a:fld id="{C755B7AF-CEAB-43A8-A757-209304369108}" type="datetimeFigureOut">
               <a:rPr lang="en-IN" smtClean="0"/>
-              <a:t>02-09-2026</a:t>
+              <a:t>25-09-2026</a:t>
             </a:fld>
             <a:endParaRPr lang="en-IN"/>
           </a:p>
@@ -1461,7 +1461,7 @@
           <a:lstStyle/>
           <a:p>
             <a:r>
-              <a:rPr lang="en-US" smtClean="0"/>
+              <a:rPr lang="en-US"/>
               <a:t>Click to edit Master title style</a:t>
             </a:r>
             <a:endParaRPr lang="en-IN"/>
@@ -1490,35 +1490,35 @@
           <a:p>
             <a:pPr lvl="0"/>
             <a:r>
-              <a:rPr lang="en-US" smtClean="0"/>
+              <a:rPr lang="en-US"/>
               <a:t>Click to edit Master text styles</a:t>
             </a:r>
           </a:p>
           <a:p>
             <a:pPr lvl="1"/>
             <a:r>
-              <a:rPr lang="en-US" smtClean="0"/>
+              <a:rPr lang="en-US"/>
               <a:t>Second level</a:t>
             </a:r>
           </a:p>
           <a:p>
             <a:pPr lvl="2"/>
             <a:r>
-              <a:rPr lang="en-US" smtClean="0"/>
+              <a:rPr lang="en-US"/>
               <a:t>Third level</a:t>
             </a:r>
           </a:p>
           <a:p>
             <a:pPr lvl="3"/>
             <a:r>
-              <a:rPr lang="en-US" smtClean="0"/>
+              <a:rPr lang="en-US"/>
               <a:t>Fourth level</a:t>
             </a:r>
           </a:p>
           <a:p>
             <a:pPr lvl="4"/>
             <a:r>
-              <a:rPr lang="en-US" smtClean="0"/>
+              <a:rPr lang="en-US"/>
               <a:t>Fifth level</a:t>
             </a:r>
             <a:endParaRPr lang="en-IN"/>
@@ -1547,35 +1547,35 @@
           <a:p>
             <a:pPr lvl="0"/>
             <a:r>
-              <a:rPr lang="en-US" smtClean="0"/>
+              <a:rPr lang="en-US"/>
               <a:t>Click to edit Master text styles</a:t>
             </a:r>
           </a:p>
           <a:p>
             <a:pPr lvl="1"/>
             <a:r>
-              <a:rPr lang="en-US" smtClean="0"/>
+              <a:rPr lang="en-US"/>
               <a:t>Second level</a:t>
             </a:r>
           </a:p>
           <a:p>
             <a:pPr lvl="2"/>
             <a:r>
-              <a:rPr lang="en-US" smtClean="0"/>
+              <a:rPr lang="en-US"/>
               <a:t>Third level</a:t>
             </a:r>
           </a:p>
           <a:p>
             <a:pPr lvl="3"/>
             <a:r>
-              <a:rPr lang="en-US" smtClean="0"/>
+              <a:rPr lang="en-US"/>
               <a:t>Fourth level</a:t>
             </a:r>
           </a:p>
           <a:p>
             <a:pPr lvl="4"/>
             <a:r>
-              <a:rPr lang="en-US" smtClean="0"/>
+              <a:rPr lang="en-US"/>
               <a:t>Fifth level</a:t>
             </a:r>
             <a:endParaRPr lang="en-IN"/>
@@ -1599,7 +1599,7 @@
           <a:p>
             <a:fld id="{C755B7AF-CEAB-43A8-A757-209304369108}" type="datetimeFigureOut">
               <a:rPr lang="en-IN" smtClean="0"/>
-              <a:t>02-09-2026</a:t>
+              <a:t>25-09-2026</a:t>
             </a:fld>
             <a:endParaRPr lang="en-IN"/>
           </a:p>
@@ -1698,7 +1698,7 @@
           <a:lstStyle/>
           <a:p>
             <a:r>
-              <a:rPr lang="en-US" smtClean="0"/>
+              <a:rPr lang="en-US"/>
               <a:t>Click to edit Master title style</a:t>
             </a:r>
             <a:endParaRPr lang="en-IN"/>
@@ -1764,7 +1764,7 @@
           <a:p>
             <a:pPr lvl="0"/>
             <a:r>
-              <a:rPr lang="en-US" smtClean="0"/>
+              <a:rPr lang="en-US"/>
               <a:t>Click to edit Master text styles</a:t>
             </a:r>
           </a:p>
@@ -1792,35 +1792,35 @@
           <a:p>
             <a:pPr lvl="0"/>
             <a:r>
-              <a:rPr lang="en-US" smtClean="0"/>
+              <a:rPr lang="en-US"/>
               <a:t>Click to edit Master text styles</a:t>
             </a:r>
           </a:p>
           <a:p>
             <a:pPr lvl="1"/>
             <a:r>
-              <a:rPr lang="en-US" smtClean="0"/>
+              <a:rPr lang="en-US"/>
               <a:t>Second level</a:t>
             </a:r>
           </a:p>
           <a:p>
             <a:pPr lvl="2"/>
             <a:r>
-              <a:rPr lang="en-US" smtClean="0"/>
+              <a:rPr lang="en-US"/>
               <a:t>Third level</a:t>
             </a:r>
           </a:p>
           <a:p>
             <a:pPr lvl="3"/>
             <a:r>
-              <a:rPr lang="en-US" smtClean="0"/>
+              <a:rPr lang="en-US"/>
               <a:t>Fourth level</a:t>
             </a:r>
           </a:p>
           <a:p>
             <a:pPr lvl="4"/>
             <a:r>
-              <a:rPr lang="en-US" smtClean="0"/>
+              <a:rPr lang="en-US"/>
               <a:t>Fifth level</a:t>
             </a:r>
             <a:endParaRPr lang="en-IN"/>
@@ -1886,7 +1886,7 @@
           <a:p>
             <a:pPr lvl="0"/>
             <a:r>
-              <a:rPr lang="en-US" smtClean="0"/>
+              <a:rPr lang="en-US"/>
               <a:t>Click to edit Master text styles</a:t>
             </a:r>
           </a:p>
@@ -1914,35 +1914,35 @@
           <a:p>
             <a:pPr lvl="0"/>
             <a:r>
-              <a:rPr lang="en-US" smtClean="0"/>
+              <a:rPr lang="en-US"/>
               <a:t>Click to edit Master text styles</a:t>
             </a:r>
           </a:p>
           <a:p>
             <a:pPr lvl="1"/>
             <a:r>
-              <a:rPr lang="en-US" smtClean="0"/>
+              <a:rPr lang="en-US"/>
               <a:t>Second level</a:t>
             </a:r>
           </a:p>
           <a:p>
             <a:pPr lvl="2"/>
             <a:r>
-              <a:rPr lang="en-US" smtClean="0"/>
+              <a:rPr lang="en-US"/>
               <a:t>Third level</a:t>
             </a:r>
           </a:p>
           <a:p>
             <a:pPr lvl="3"/>
             <a:r>
-              <a:rPr lang="en-US" smtClean="0"/>
+              <a:rPr lang="en-US"/>
               <a:t>Fourth level</a:t>
             </a:r>
           </a:p>
           <a:p>
             <a:pPr lvl="4"/>
             <a:r>
-              <a:rPr lang="en-US" smtClean="0"/>
+              <a:rPr lang="en-US"/>
               <a:t>Fifth level</a:t>
             </a:r>
             <a:endParaRPr lang="en-IN"/>
@@ -1966,7 +1966,7 @@
           <a:p>
             <a:fld id="{C755B7AF-CEAB-43A8-A757-209304369108}" type="datetimeFigureOut">
               <a:rPr lang="en-IN" smtClean="0"/>
-              <a:t>02-09-2026</a:t>
+              <a:t>25-09-2026</a:t>
             </a:fld>
             <a:endParaRPr lang="en-IN"/>
           </a:p>
@@ -2060,7 +2060,7 @@
           <a:lstStyle/>
           <a:p>
             <a:r>
-              <a:rPr lang="en-US" smtClean="0"/>
+              <a:rPr lang="en-US"/>
               <a:t>Click to edit Master title style</a:t>
             </a:r>
             <a:endParaRPr lang="en-IN"/>
@@ -2084,7 +2084,7 @@
           <a:p>
             <a:fld id="{C755B7AF-CEAB-43A8-A757-209304369108}" type="datetimeFigureOut">
               <a:rPr lang="en-IN" smtClean="0"/>
-              <a:t>02-09-2026</a:t>
+              <a:t>25-09-2026</a:t>
             </a:fld>
             <a:endParaRPr lang="en-IN"/>
           </a:p>
@@ -2179,7 +2179,7 @@
           <a:p>
             <a:fld id="{C755B7AF-CEAB-43A8-A757-209304369108}" type="datetimeFigureOut">
               <a:rPr lang="en-IN" smtClean="0"/>
-              <a:t>02-09-2026</a:t>
+              <a:t>25-09-2026</a:t>
             </a:fld>
             <a:endParaRPr lang="en-IN"/>
           </a:p>
@@ -2282,7 +2282,7 @@
           </a:lstStyle>
           <a:p>
             <a:r>
-              <a:rPr lang="en-US" smtClean="0"/>
+              <a:rPr lang="en-US"/>
               <a:t>Click to edit Master title style</a:t>
             </a:r>
             <a:endParaRPr lang="en-IN"/>
@@ -2339,35 +2339,35 @@
           <a:p>
             <a:pPr lvl="0"/>
             <a:r>
-              <a:rPr lang="en-US" smtClean="0"/>
+              <a:rPr lang="en-US"/>
               <a:t>Click to edit Master text styles</a:t>
             </a:r>
           </a:p>
           <a:p>
             <a:pPr lvl="1"/>
             <a:r>
-              <a:rPr lang="en-US" smtClean="0"/>
+              <a:rPr lang="en-US"/>
               <a:t>Second level</a:t>
             </a:r>
           </a:p>
           <a:p>
             <a:pPr lvl="2"/>
             <a:r>
-              <a:rPr lang="en-US" smtClean="0"/>
+              <a:rPr lang="en-US"/>
               <a:t>Third level</a:t>
             </a:r>
           </a:p>
           <a:p>
             <a:pPr lvl="3"/>
             <a:r>
-              <a:rPr lang="en-US" smtClean="0"/>
+              <a:rPr lang="en-US"/>
               <a:t>Fourth level</a:t>
             </a:r>
           </a:p>
           <a:p>
             <a:pPr lvl="4"/>
             <a:r>
-              <a:rPr lang="en-US" smtClean="0"/>
+              <a:rPr lang="en-US"/>
               <a:t>Fifth level</a:t>
             </a:r>
             <a:endParaRPr lang="en-IN"/>
@@ -2433,7 +2433,7 @@
           <a:p>
             <a:pPr lvl="0"/>
             <a:r>
-              <a:rPr lang="en-US" smtClean="0"/>
+              <a:rPr lang="en-US"/>
               <a:t>Click to edit Master text styles</a:t>
             </a:r>
           </a:p>
@@ -2456,7 +2456,7 @@
           <a:p>
             <a:fld id="{C755B7AF-CEAB-43A8-A757-209304369108}" type="datetimeFigureOut">
               <a:rPr lang="en-IN" smtClean="0"/>
-              <a:t>02-09-2026</a:t>
+              <a:t>25-09-2026</a:t>
             </a:fld>
             <a:endParaRPr lang="en-IN"/>
           </a:p>
@@ -2559,7 +2559,7 @@
           </a:lstStyle>
           <a:p>
             <a:r>
-              <a:rPr lang="en-US" smtClean="0"/>
+              <a:rPr lang="en-US"/>
               <a:t>Click to edit Master title style</a:t>
             </a:r>
             <a:endParaRPr lang="en-IN"/>
@@ -2686,7 +2686,7 @@
           <a:p>
             <a:pPr lvl="0"/>
             <a:r>
-              <a:rPr lang="en-US" smtClean="0"/>
+              <a:rPr lang="en-US"/>
               <a:t>Click to edit Master text styles</a:t>
             </a:r>
           </a:p>
@@ -2709,7 +2709,7 @@
           <a:p>
             <a:fld id="{C755B7AF-CEAB-43A8-A757-209304369108}" type="datetimeFigureOut">
               <a:rPr lang="en-IN" smtClean="0"/>
-              <a:t>02-09-2026</a:t>
+              <a:t>25-09-2026</a:t>
             </a:fld>
             <a:endParaRPr lang="en-IN"/>
           </a:p>
@@ -2818,7 +2818,7 @@
           <a:lstStyle/>
           <a:p>
             <a:r>
-              <a:rPr lang="en-US" smtClean="0"/>
+              <a:rPr lang="en-US"/>
               <a:t>Click to edit Master title style</a:t>
             </a:r>
             <a:endParaRPr lang="en-IN"/>
@@ -2852,35 +2852,35 @@
           <a:p>
             <a:pPr lvl="0"/>
             <a:r>
-              <a:rPr lang="en-US" smtClean="0"/>
+              <a:rPr lang="en-US"/>
               <a:t>Click to edit Master text styles</a:t>
             </a:r>
           </a:p>
           <a:p>
             <a:pPr lvl="1"/>
             <a:r>
-              <a:rPr lang="en-US" smtClean="0"/>
+              <a:rPr lang="en-US"/>
               <a:t>Second level</a:t>
             </a:r>
           </a:p>
           <a:p>
             <a:pPr lvl="2"/>
             <a:r>
-              <a:rPr lang="en-US" smtClean="0"/>
+              <a:rPr lang="en-US"/>
               <a:t>Third level</a:t>
             </a:r>
           </a:p>
           <a:p>
             <a:pPr lvl="3"/>
             <a:r>
-              <a:rPr lang="en-US" smtClean="0"/>
+              <a:rPr lang="en-US"/>
               <a:t>Fourth level</a:t>
             </a:r>
           </a:p>
           <a:p>
             <a:pPr lvl="4"/>
             <a:r>
-              <a:rPr lang="en-US" smtClean="0"/>
+              <a:rPr lang="en-US"/>
               <a:t>Fifth level</a:t>
             </a:r>
             <a:endParaRPr lang="en-IN"/>
@@ -2922,7 +2922,7 @@
           <a:p>
             <a:fld id="{C755B7AF-CEAB-43A8-A757-209304369108}" type="datetimeFigureOut">
               <a:rPr lang="en-IN" smtClean="0"/>
-              <a:t>02-09-2026</a:t>
+              <a:t>25-09-2026</a:t>
             </a:fld>
             <a:endParaRPr lang="en-IN"/>
           </a:p>
@@ -3349,7 +3349,7 @@
           <a:p>
             <a:pPr algn="ctr"/>
             <a:r>
-              <a:rPr lang="en-US" b="1" dirty="0" smtClean="0">
+              <a:rPr lang="en-US" b="1" dirty="0">
                 <a:solidFill>
                   <a:schemeClr val="tx2"/>
                 </a:solidFill>
@@ -3383,7 +3383,7 @@
           </a:bodyPr>
           <a:lstStyle/>
           <a:p>
-            <a:endParaRPr lang="en-US" dirty="0" smtClean="0"/>
+            <a:endParaRPr lang="en-US" dirty="0"/>
           </a:p>
           <a:p>
             <a:pPr marL="285750" indent="-285750" algn="just">
@@ -3392,12 +3392,23 @@
               </a:lnSpc>
             </a:pPr>
             <a:r>
-              <a:rPr lang="en-US" b="1" dirty="0" smtClean="0">
+              <a:rPr lang="en-US" b="1" dirty="0">
                 <a:latin typeface="Arial" panose="020B0604020202020204" pitchFamily="34" charset="0"/>
                 <a:cs typeface="Arial" panose="020B0604020202020204" pitchFamily="34" charset="0"/>
               </a:rPr>
-              <a:t>Problem Statement ID –</a:t>
-            </a:r>
+              <a:t>Problem Statement </a:t>
+            </a:r>
+            <a:r>
+              <a:rPr lang="en-US" b="1">
+                <a:latin typeface="Arial" panose="020B0604020202020204" pitchFamily="34" charset="0"/>
+                <a:cs typeface="Arial" panose="020B0604020202020204" pitchFamily="34" charset="0"/>
+              </a:rPr>
+              <a:t>ID –SIH26180</a:t>
+            </a:r>
+            <a:endParaRPr lang="en-US" b="1" dirty="0">
+              <a:latin typeface="Arial" panose="020B0604020202020204" pitchFamily="34" charset="0"/>
+              <a:cs typeface="Arial" panose="020B0604020202020204" pitchFamily="34" charset="0"/>
+            </a:endParaRPr>
           </a:p>
           <a:p>
             <a:pPr marL="285750" indent="-285750" algn="just">
@@ -3406,28 +3417,28 @@
               </a:lnSpc>
             </a:pPr>
             <a:r>
-              <a:rPr lang="en-US" b="1" dirty="0" smtClean="0">
+              <a:rPr lang="en-US" b="1" dirty="0">
                 <a:latin typeface="Arial" panose="020B0604020202020204" pitchFamily="34" charset="0"/>
                 <a:cs typeface="Arial" panose="020B0604020202020204" pitchFamily="34" charset="0"/>
               </a:rPr>
               <a:t>Problem Statement </a:t>
             </a:r>
             <a:r>
-              <a:rPr lang="en-US" sz="2600" b="1" dirty="0" smtClean="0">
+              <a:rPr lang="en-US" sz="2600" b="1" dirty="0">
                 <a:latin typeface="Arial" panose="020B0604020202020204" pitchFamily="34" charset="0"/>
                 <a:cs typeface="Arial" panose="020B0604020202020204" pitchFamily="34" charset="0"/>
               </a:rPr>
               <a:t>Title-</a:t>
             </a:r>
             <a:r>
-              <a:rPr lang="en-US" sz="2600" dirty="0" smtClean="0">
+              <a:rPr lang="en-US" sz="2600" dirty="0">
                 <a:latin typeface="Arial" panose="020B0604020202020204" pitchFamily="34" charset="0"/>
                 <a:cs typeface="Arial" panose="020B0604020202020204" pitchFamily="34" charset="0"/>
               </a:rPr>
               <a:t> </a:t>
             </a:r>
             <a:r>
-              <a:rPr lang="en-US" sz="2600" dirty="0" smtClean="0">
+              <a:rPr lang="en-US" sz="2600" dirty="0">
                 <a:solidFill>
                   <a:schemeClr val="accent1">
                     <a:lumMod val="75000"/>
@@ -3439,13 +3450,13 @@
               <a:t>AquaMind Sentinel</a:t>
             </a:r>
             <a:r>
-              <a:rPr lang="en-US" sz="2600" dirty="0" smtClean="0">
+              <a:rPr lang="en-US" sz="2600" dirty="0">
                 <a:latin typeface="Arial" panose="020B0604020202020204" pitchFamily="34" charset="0"/>
                 <a:cs typeface="Arial" panose="020B0604020202020204" pitchFamily="34" charset="0"/>
               </a:rPr>
               <a:t>-That decides every drop before it falls.</a:t>
             </a:r>
-            <a:endParaRPr lang="en-US" sz="2600" b="1" dirty="0" smtClean="0">
+            <a:endParaRPr lang="en-US" sz="2600" b="1" dirty="0">
               <a:latin typeface="Arial" panose="020B0604020202020204" pitchFamily="34" charset="0"/>
               <a:cs typeface="Arial" panose="020B0604020202020204" pitchFamily="34" charset="0"/>
             </a:endParaRPr>
@@ -3457,14 +3468,14 @@
               </a:lnSpc>
             </a:pPr>
             <a:r>
-              <a:rPr lang="en-US" b="1" dirty="0" smtClean="0">
+              <a:rPr lang="en-US" b="1" dirty="0">
                 <a:latin typeface="Arial" panose="020B0604020202020204" pitchFamily="34" charset="0"/>
                 <a:cs typeface="Arial" panose="020B0604020202020204" pitchFamily="34" charset="0"/>
               </a:rPr>
               <a:t>Theme- </a:t>
             </a:r>
             <a:r>
-              <a:rPr lang="en-US" sz="2600" dirty="0" smtClean="0">
+              <a:rPr lang="en-US" sz="2600" dirty="0">
                 <a:latin typeface="Arial" panose="020B0604020202020204" pitchFamily="34" charset="0"/>
                 <a:cs typeface="Arial" panose="020B0604020202020204" pitchFamily="34" charset="0"/>
               </a:rPr>
@@ -3478,20 +3489,20 @@
               </a:lnSpc>
             </a:pPr>
             <a:r>
-              <a:rPr lang="en-US" b="1" dirty="0" smtClean="0">
+              <a:rPr lang="en-US" b="1" dirty="0">
                 <a:latin typeface="Arial" panose="020B0604020202020204" pitchFamily="34" charset="0"/>
                 <a:cs typeface="Arial" panose="020B0604020202020204" pitchFamily="34" charset="0"/>
               </a:rPr>
               <a:t>PS Category- </a:t>
             </a:r>
             <a:r>
-              <a:rPr lang="en-US" sz="2600" dirty="0" err="1" smtClean="0">
+              <a:rPr lang="en-US" sz="2600" dirty="0" err="1">
                 <a:latin typeface="Arial" panose="020B0604020202020204" pitchFamily="34" charset="0"/>
                 <a:cs typeface="Arial" panose="020B0604020202020204" pitchFamily="34" charset="0"/>
               </a:rPr>
               <a:t>Software+hardware</a:t>
             </a:r>
-            <a:endParaRPr lang="en-US" sz="2600" dirty="0" smtClean="0">
+            <a:endParaRPr lang="en-US" sz="2600" dirty="0">
               <a:latin typeface="Arial" panose="020B0604020202020204" pitchFamily="34" charset="0"/>
               <a:cs typeface="Arial" panose="020B0604020202020204" pitchFamily="34" charset="0"/>
             </a:endParaRPr>
@@ -3503,7 +3514,7 @@
               </a:lnSpc>
             </a:pPr>
             <a:r>
-              <a:rPr lang="en-US" b="1" dirty="0" smtClean="0">
+              <a:rPr lang="en-US" b="1" dirty="0">
                 <a:latin typeface="Arial" panose="020B0604020202020204" pitchFamily="34" charset="0"/>
                 <a:cs typeface="Arial" panose="020B0604020202020204" pitchFamily="34" charset="0"/>
               </a:rPr>
@@ -3517,20 +3528,20 @@
               </a:lnSpc>
             </a:pPr>
             <a:r>
-              <a:rPr lang="en-US" b="1" dirty="0" smtClean="0">
+              <a:rPr lang="en-US" b="1" dirty="0">
                 <a:latin typeface="Arial" panose="020B0604020202020204" pitchFamily="34" charset="0"/>
                 <a:cs typeface="Arial" panose="020B0604020202020204" pitchFamily="34" charset="0"/>
               </a:rPr>
               <a:t>Team Name – </a:t>
             </a:r>
             <a:r>
-              <a:rPr lang="en-US" sz="2600" dirty="0" smtClean="0">
+              <a:rPr lang="en-US" sz="2600" dirty="0">
                 <a:latin typeface="Arial" panose="020B0604020202020204" pitchFamily="34" charset="0"/>
                 <a:cs typeface="Arial" panose="020B0604020202020204" pitchFamily="34" charset="0"/>
               </a:rPr>
               <a:t>Team AquaMind</a:t>
             </a:r>
-            <a:endParaRPr lang="en-IN" sz="2600" dirty="0" smtClean="0">
+            <a:endParaRPr lang="en-IN" sz="2600" dirty="0">
               <a:latin typeface="Arial" panose="020B0604020202020204" pitchFamily="34" charset="0"/>
               <a:cs typeface="Arial" panose="020B0604020202020204" pitchFamily="34" charset="0"/>
             </a:endParaRPr>
@@ -3653,7 +3664,7 @@
           <a:p>
             <a:pPr algn="ctr"/>
             <a:r>
-              <a:rPr lang="en-US" sz="3600" b="1" u="sng" dirty="0" smtClean="0">
+              <a:rPr lang="en-US" sz="3600" b="1" u="sng" dirty="0">
                 <a:solidFill>
                   <a:schemeClr val="tx2"/>
                 </a:solidFill>
@@ -3735,7 +3746,7 @@
           <a:lstStyle/>
           <a:p>
             <a:r>
-              <a:rPr lang="en-US" sz="2400" dirty="0" smtClean="0">
+              <a:rPr lang="en-US" sz="2400" dirty="0">
                 <a:solidFill>
                   <a:schemeClr val="accent6">
                     <a:lumMod val="50000"/>
@@ -3746,7 +3757,7 @@
               <a:t>Understanding problem </a:t>
             </a:r>
             <a:r>
-              <a:rPr lang="en-US" sz="2400" dirty="0" smtClean="0">
+              <a:rPr lang="en-US" sz="2400" dirty="0">
                 <a:latin typeface="Algerian" panose="04020705040A02060702" pitchFamily="82" charset="0"/>
               </a:rPr>
               <a:t>:</a:t>
@@ -3754,7 +3765,7 @@
           </a:p>
           <a:p>
             <a:r>
-              <a:rPr lang="en-US" b="1" dirty="0" smtClean="0">
+              <a:rPr lang="en-US" b="1" dirty="0">
                 <a:solidFill>
                   <a:schemeClr val="tx1">
                     <a:lumMod val="95000"/>
@@ -3764,7 +3775,7 @@
               </a:rPr>
               <a:t>1.Water Wastage: </a:t>
             </a:r>
-            <a:endParaRPr lang="en-US" dirty="0" smtClean="0">
+            <a:endParaRPr lang="en-US" dirty="0">
               <a:solidFill>
                 <a:schemeClr val="tx1">
                   <a:lumMod val="95000"/>
@@ -3775,7 +3786,7 @@
           </a:p>
           <a:p>
             <a:r>
-              <a:rPr lang="en-US" b="1" dirty="0" smtClean="0">
+              <a:rPr lang="en-US" b="1" dirty="0">
                 <a:solidFill>
                   <a:schemeClr val="tx1">
                     <a:lumMod val="95000"/>
@@ -3785,7 +3796,7 @@
               </a:rPr>
               <a:t>2.Lack of Monitoring: </a:t>
             </a:r>
-            <a:endParaRPr lang="en-US" dirty="0" smtClean="0">
+            <a:endParaRPr lang="en-US" dirty="0">
               <a:solidFill>
                 <a:schemeClr val="tx1">
                   <a:lumMod val="95000"/>
@@ -3796,7 +3807,7 @@
           </a:p>
           <a:p>
             <a:r>
-              <a:rPr lang="en-US" b="1" dirty="0" smtClean="0">
+              <a:rPr lang="en-US" b="1" dirty="0">
                 <a:solidFill>
                   <a:schemeClr val="tx1">
                     <a:lumMod val="95000"/>
@@ -3806,7 +3817,7 @@
               </a:rPr>
               <a:t>3.Unpredictable Weather: </a:t>
             </a:r>
-            <a:endParaRPr lang="en-US" dirty="0" smtClean="0">
+            <a:endParaRPr lang="en-US" dirty="0">
               <a:solidFill>
                 <a:schemeClr val="tx1">
                   <a:lumMod val="95000"/>
@@ -3817,7 +3828,7 @@
           </a:p>
           <a:p>
             <a:r>
-              <a:rPr lang="en-US" b="1" dirty="0" smtClean="0">
+              <a:rPr lang="en-US" b="1" dirty="0">
                 <a:solidFill>
                   <a:schemeClr val="tx1">
                     <a:lumMod val="95000"/>
@@ -3827,7 +3838,7 @@
               </a:rPr>
               <a:t>4.Manual Dependency: </a:t>
             </a:r>
-            <a:endParaRPr lang="en-US" dirty="0" smtClean="0">
+            <a:endParaRPr lang="en-US" dirty="0">
               <a:solidFill>
                 <a:schemeClr val="tx1">
                   <a:lumMod val="95000"/>
@@ -3838,7 +3849,7 @@
           </a:p>
           <a:p>
             <a:r>
-              <a:rPr lang="en-US" b="1" dirty="0" smtClean="0">
+              <a:rPr lang="en-US" b="1" dirty="0">
                 <a:solidFill>
                   <a:schemeClr val="tx1">
                     <a:lumMod val="95000"/>
@@ -3849,7 +3860,7 @@
               <a:t>5.Limited Intelligence</a:t>
             </a:r>
             <a:r>
-              <a:rPr lang="en-US" sz="1400" b="1" dirty="0" smtClean="0">
+              <a:rPr lang="en-US" sz="1400" b="1" dirty="0">
                 <a:solidFill>
                   <a:schemeClr val="tx1">
                     <a:lumMod val="95000"/>
@@ -3912,7 +3923,7 @@
           <a:lstStyle/>
           <a:p>
             <a:r>
-              <a:rPr lang="en-US" sz="2000" dirty="0" smtClean="0">
+              <a:rPr lang="en-US" sz="2000" dirty="0">
                 <a:solidFill>
                   <a:schemeClr val="accent6">
                     <a:lumMod val="50000"/>
@@ -3923,7 +3934,7 @@
               <a:t>PRopoSED SOLUTION </a:t>
             </a:r>
             <a:r>
-              <a:rPr lang="en-US" sz="2000" b="1" dirty="0" smtClean="0">
+              <a:rPr lang="en-US" sz="2000" b="1" dirty="0">
                 <a:solidFill>
                   <a:schemeClr val="accent6">
                     <a:lumMod val="50000"/>
@@ -3936,7 +3947,7 @@
           </a:p>
           <a:p>
             <a:r>
-              <a:rPr lang="en-US" b="1" dirty="0" smtClean="0">
+              <a:rPr lang="en-US" b="1" dirty="0">
                 <a:solidFill>
                   <a:schemeClr val="tx1">
                     <a:lumMod val="95000"/>
@@ -3949,7 +3960,7 @@
           </a:p>
           <a:p>
             <a:r>
-              <a:rPr lang="en-US" b="1" dirty="0" smtClean="0">
+              <a:rPr lang="en-US" b="1" dirty="0">
                 <a:solidFill>
                   <a:schemeClr val="tx1">
                     <a:lumMod val="95000"/>
@@ -3962,7 +3973,7 @@
           </a:p>
           <a:p>
             <a:r>
-              <a:rPr lang="en-US" b="1" dirty="0" smtClean="0">
+              <a:rPr lang="en-US" b="1" dirty="0">
                 <a:solidFill>
                   <a:schemeClr val="tx1">
                     <a:lumMod val="95000"/>
@@ -3975,7 +3986,7 @@
           </a:p>
           <a:p>
             <a:r>
-              <a:rPr lang="en-US" b="1" dirty="0" smtClean="0">
+              <a:rPr lang="en-US" b="1" dirty="0">
                 <a:solidFill>
                   <a:schemeClr val="tx1">
                     <a:lumMod val="95000"/>
@@ -3988,7 +3999,7 @@
           </a:p>
           <a:p>
             <a:r>
-              <a:rPr lang="en-US" b="1" dirty="0" smtClean="0">
+              <a:rPr lang="en-US" b="1" dirty="0">
                 <a:solidFill>
                   <a:schemeClr val="tx1">
                     <a:lumMod val="95000"/>
@@ -4051,7 +4062,7 @@
           <a:lstStyle/>
           <a:p>
             <a:r>
-              <a:rPr lang="en-IN" b="1" dirty="0" smtClean="0">
+              <a:rPr lang="en-IN" b="1" dirty="0">
                 <a:solidFill>
                   <a:schemeClr val="tx1">
                     <a:lumMod val="95000"/>
@@ -4062,7 +4073,7 @@
               <a:t>1.AI-Based Decisions:</a:t>
             </a:r>
             <a:r>
-              <a:rPr lang="en-IN" dirty="0" smtClean="0">
+              <a:rPr lang="en-IN" dirty="0">
                 <a:solidFill>
                   <a:schemeClr val="tx1">
                     <a:lumMod val="95000"/>
@@ -4075,7 +4086,7 @@
           </a:p>
           <a:p>
             <a:r>
-              <a:rPr lang="en-IN" b="1" dirty="0" smtClean="0">
+              <a:rPr lang="en-IN" b="1" dirty="0">
                 <a:solidFill>
                   <a:schemeClr val="tx1">
                     <a:lumMod val="95000"/>
@@ -4086,7 +4097,7 @@
               <a:t>2.Predictive Irrigation</a:t>
             </a:r>
             <a:r>
-              <a:rPr lang="en-IN" dirty="0" smtClean="0">
+              <a:rPr lang="en-IN" dirty="0">
                 <a:solidFill>
                   <a:schemeClr val="tx1">
                     <a:lumMod val="95000"/>
@@ -4099,7 +4110,7 @@
           </a:p>
           <a:p>
             <a:r>
-              <a:rPr lang="en-IN" b="1" dirty="0" smtClean="0">
+              <a:rPr lang="en-IN" b="1" dirty="0">
                 <a:solidFill>
                   <a:schemeClr val="tx1">
                     <a:lumMod val="95000"/>
@@ -4110,7 +4121,7 @@
               <a:t>3.Multisensor Intelligence: </a:t>
             </a:r>
             <a:r>
-              <a:rPr lang="en-IN" dirty="0" smtClean="0">
+              <a:rPr lang="en-IN" dirty="0">
                 <a:solidFill>
                   <a:schemeClr val="tx1">
                     <a:lumMod val="95000"/>
@@ -4123,7 +4134,7 @@
           </a:p>
           <a:p>
             <a:r>
-              <a:rPr lang="en-IN" b="1" dirty="0" smtClean="0">
+              <a:rPr lang="en-IN" b="1" dirty="0">
                 <a:solidFill>
                   <a:schemeClr val="tx1">
                     <a:lumMod val="95000"/>
@@ -4134,7 +4145,7 @@
               <a:t>4.Autonomous Operation: </a:t>
             </a:r>
             <a:r>
-              <a:rPr lang="en-IN" dirty="0" smtClean="0">
+              <a:rPr lang="en-IN" dirty="0">
                 <a:solidFill>
                   <a:schemeClr val="tx1">
                     <a:lumMod val="95000"/>
@@ -4147,7 +4158,7 @@
           </a:p>
           <a:p>
             <a:r>
-              <a:rPr lang="en-IN" b="1" dirty="0" smtClean="0">
+              <a:rPr lang="en-IN" b="1" dirty="0">
                 <a:solidFill>
                   <a:schemeClr val="tx1">
                     <a:lumMod val="95000"/>
@@ -4158,7 +4169,7 @@
               <a:t>5.Location-Based Weather: </a:t>
             </a:r>
             <a:r>
-              <a:rPr lang="en-IN" dirty="0" smtClean="0">
+              <a:rPr lang="en-IN" dirty="0">
                 <a:solidFill>
                   <a:schemeClr val="tx1">
                     <a:lumMod val="95000"/>
@@ -4171,7 +4182,7 @@
           </a:p>
           <a:p>
             <a:r>
-              <a:rPr lang="en-IN" b="1" dirty="0" smtClean="0">
+              <a:rPr lang="en-IN" b="1" dirty="0">
                 <a:solidFill>
                   <a:schemeClr val="tx1">
                     <a:lumMod val="95000"/>
@@ -4182,7 +4193,7 @@
               <a:t>6.Water-Efficient &amp; Scalable: </a:t>
             </a:r>
             <a:r>
-              <a:rPr lang="en-IN" dirty="0" smtClean="0">
+              <a:rPr lang="en-IN" dirty="0">
                 <a:solidFill>
                   <a:schemeClr val="tx1">
                     <a:lumMod val="95000"/>
@@ -4193,7 +4204,7 @@
               <a:t>Suitable for farms and nurseries with scope for larger deployment</a:t>
             </a:r>
             <a:r>
-              <a:rPr lang="en-IN" sz="1600" dirty="0" smtClean="0">
+              <a:rPr lang="en-IN" sz="1600" dirty="0">
                 <a:solidFill>
                   <a:schemeClr val="tx1">
                     <a:lumMod val="95000"/>
@@ -4203,14 +4214,6 @@
               </a:rPr>
               <a:t>.</a:t>
             </a:r>
-            <a:endParaRPr lang="en-IN" sz="1600" dirty="0">
-              <a:solidFill>
-                <a:schemeClr val="tx1">
-                  <a:lumMod val="95000"/>
-                  <a:lumOff val="5000"/>
-                </a:schemeClr>
-              </a:solidFill>
-            </a:endParaRPr>
           </a:p>
         </p:txBody>
       </p:sp>
@@ -4236,7 +4239,7 @@
           <a:lstStyle/>
           <a:p>
             <a:r>
-              <a:rPr lang="en-US" sz="2400" dirty="0" smtClean="0">
+              <a:rPr lang="en-US" sz="2400" dirty="0">
                 <a:solidFill>
                   <a:schemeClr val="accent6">
                     <a:lumMod val="50000"/>
@@ -4247,7 +4250,7 @@
               <a:t>OUR UNIQUE SOLUTION </a:t>
             </a:r>
             <a:r>
-              <a:rPr lang="en-US" sz="2400" b="1" dirty="0" smtClean="0">
+              <a:rPr lang="en-US" sz="2400" b="1" dirty="0">
                 <a:solidFill>
                   <a:schemeClr val="accent6">
                     <a:lumMod val="50000"/>
@@ -4259,7 +4262,7 @@
             </a:r>
           </a:p>
           <a:p>
-            <a:endParaRPr lang="en-US" sz="2400" b="1" dirty="0" smtClean="0">
+            <a:endParaRPr lang="en-US" sz="2400" b="1" dirty="0">
               <a:solidFill>
                 <a:schemeClr val="accent6">
                   <a:lumMod val="50000"/>
@@ -4270,7 +4273,7 @@
           </a:p>
           <a:p>
             <a:r>
-              <a:rPr lang="en-US" sz="2400" b="1" dirty="0" smtClean="0">
+              <a:rPr lang="en-US" sz="2400" b="1" dirty="0">
                 <a:solidFill>
                   <a:schemeClr val="accent6">
                     <a:lumMod val="50000"/>
@@ -4410,10 +4413,10 @@
           <p:cNvPr id="14" name="Oval 13" descr="Your startup LOGO">
             <a:extLst>
               <a:ext uri="{FF2B5EF4-FFF2-40B4-BE49-F238E27FC236}">
-                <a16:creationId xmlns="" xmlns:a16="http://schemas.microsoft.com/office/drawing/2014/main" xmlns:lc="http://schemas.openxmlformats.org/drawingml/2006/lockedCanvas" id="{5DBCE864-823D-4A13-9607-5DA1F0ED5FB8}"/>
+                <a16:creationId xmlns:a16="http://schemas.microsoft.com/office/drawing/2014/main" id="{5DBCE864-823D-4A13-9607-5DA1F0ED5FB8}"/>
               </a:ext>
               <a:ext uri="{C183D7F6-B498-43B3-948B-1728B52AA6E4}">
-                <adec:decorative xmlns:adec="http://schemas.microsoft.com/office/drawing/2017/decorative" xmlns="" xmlns:lc="http://schemas.openxmlformats.org/drawingml/2006/lockedCanvas" val="0"/>
+                <adec:decorative xmlns:adec="http://schemas.microsoft.com/office/drawing/2017/decorative" val="0"/>
               </a:ext>
             </a:extLst>
           </p:cNvPr>
@@ -4573,14 +4576,14 @@
           <a:p>
             <a:pPr algn="ctr"/>
             <a:r>
-              <a:rPr lang="en-US" sz="1200" b="1" dirty="0" smtClean="0"/>
+              <a:rPr lang="en-US" sz="1200" b="1" dirty="0"/>
               <a:t>Team</a:t>
             </a:r>
           </a:p>
           <a:p>
             <a:pPr algn="ctr"/>
             <a:r>
-              <a:rPr lang="en-US" sz="1200" b="1" dirty="0" smtClean="0"/>
+              <a:rPr lang="en-US" sz="1200" b="1" dirty="0"/>
               <a:t>AquaMind</a:t>
             </a:r>
             <a:endParaRPr lang="en-IN" sz="1200" b="1" dirty="0"/>
@@ -4671,7 +4674,7 @@
           <a:p>
             <a:pPr algn="ctr"/>
             <a:r>
-              <a:rPr lang="en-US" sz="2800" b="1" dirty="0" smtClean="0">
+              <a:rPr lang="en-US" sz="2800" b="1" dirty="0">
                 <a:latin typeface="Times New Roman" panose="02020603050405020304" pitchFamily="18" charset="0"/>
                 <a:ea typeface="ＭＳ Ｐゴシック" pitchFamily="1" charset="-128"/>
                 <a:cs typeface="Times New Roman" panose="02020603050405020304" pitchFamily="18" charset="0"/>
@@ -4770,10 +4773,10 @@
           <p:cNvPr id="11" name="Oval 10" descr="Your startup LOGO">
             <a:extLst>
               <a:ext uri="{FF2B5EF4-FFF2-40B4-BE49-F238E27FC236}">
-                <a16:creationId xmlns="" xmlns:a16="http://schemas.microsoft.com/office/drawing/2014/main" xmlns:lc="http://schemas.openxmlformats.org/drawingml/2006/lockedCanvas" id="{5DBCE864-823D-4A13-9607-5DA1F0ED5FB8}"/>
+                <a16:creationId xmlns:a16="http://schemas.microsoft.com/office/drawing/2014/main" id="{5DBCE864-823D-4A13-9607-5DA1F0ED5FB8}"/>
               </a:ext>
               <a:ext uri="{C183D7F6-B498-43B3-948B-1728B52AA6E4}">
-                <adec:decorative xmlns:adec="http://schemas.microsoft.com/office/drawing/2017/decorative" xmlns="" xmlns:lc="http://schemas.openxmlformats.org/drawingml/2006/lockedCanvas" val="0"/>
+                <adec:decorative xmlns:adec="http://schemas.microsoft.com/office/drawing/2017/decorative" val="0"/>
               </a:ext>
             </a:extLst>
           </p:cNvPr>
@@ -4933,14 +4936,14 @@
           <a:p>
             <a:pPr algn="ctr"/>
             <a:r>
-              <a:rPr lang="en-US" dirty="0" smtClean="0"/>
+              <a:rPr lang="en-US" dirty="0"/>
               <a:t>Team</a:t>
             </a:r>
           </a:p>
           <a:p>
             <a:pPr algn="ctr"/>
             <a:r>
-              <a:rPr lang="en-US" sz="1200" b="1" dirty="0" smtClean="0"/>
+              <a:rPr lang="en-US" sz="1200" b="1" dirty="0"/>
               <a:t>AquaMind</a:t>
             </a:r>
             <a:endParaRPr lang="en-IN" sz="1200" b="1" dirty="0"/>
@@ -5595,7 +5598,7 @@
           <a:p>
             <a:pPr algn="ctr"/>
             <a:r>
-              <a:rPr lang="en-US" sz="3200" b="1" dirty="0" smtClean="0">
+              <a:rPr lang="en-US" sz="3200" b="1" dirty="0">
                 <a:latin typeface="Times New Roman" panose="02020603050405020304" pitchFamily="18" charset="0"/>
                 <a:ea typeface="ＭＳ Ｐゴシック" pitchFamily="1" charset="-128"/>
                 <a:cs typeface="Times New Roman" panose="02020603050405020304" pitchFamily="18" charset="0"/>
@@ -5611,10 +5614,10 @@
           <p:cNvPr id="4" name="Oval 3" descr="Your startup LOGO">
             <a:extLst>
               <a:ext uri="{FF2B5EF4-FFF2-40B4-BE49-F238E27FC236}">
-                <a16:creationId xmlns="" xmlns:a16="http://schemas.microsoft.com/office/drawing/2014/main" xmlns:lc="http://schemas.openxmlformats.org/drawingml/2006/lockedCanvas" id="{5DBCE864-823D-4A13-9607-5DA1F0ED5FB8}"/>
+                <a16:creationId xmlns:a16="http://schemas.microsoft.com/office/drawing/2014/main" id="{5DBCE864-823D-4A13-9607-5DA1F0ED5FB8}"/>
               </a:ext>
               <a:ext uri="{C183D7F6-B498-43B3-948B-1728B52AA6E4}">
-                <adec:decorative xmlns:adec="http://schemas.microsoft.com/office/drawing/2017/decorative" xmlns="" xmlns:lc="http://schemas.openxmlformats.org/drawingml/2006/lockedCanvas" val="0"/>
+                <adec:decorative xmlns:adec="http://schemas.microsoft.com/office/drawing/2017/decorative" val="0"/>
               </a:ext>
             </a:extLst>
           </p:cNvPr>
@@ -5774,14 +5777,14 @@
           <a:p>
             <a:pPr algn="ctr"/>
             <a:r>
-              <a:rPr lang="en-US" dirty="0" smtClean="0"/>
+              <a:rPr lang="en-US" dirty="0"/>
               <a:t>Team</a:t>
             </a:r>
           </a:p>
           <a:p>
             <a:pPr algn="ctr"/>
             <a:r>
-              <a:rPr lang="en-US" sz="1200" b="1" dirty="0" smtClean="0"/>
+              <a:rPr lang="en-US" sz="1200" b="1" dirty="0"/>
               <a:t>AquaMind</a:t>
             </a:r>
             <a:endParaRPr lang="en-IN" sz="1200" b="1" dirty="0"/>
@@ -5977,7 +5980,7 @@
           <a:p>
             <a:pPr algn="ctr"/>
             <a:r>
-              <a:rPr lang="en-US" sz="2800" dirty="0" smtClean="0">
+              <a:rPr lang="en-US" sz="2800" dirty="0">
                 <a:solidFill>
                   <a:schemeClr val="tx1"/>
                 </a:solidFill>
@@ -6032,7 +6035,7 @@
           <a:p>
             <a:pPr algn="ctr"/>
             <a:r>
-              <a:rPr lang="en-US" sz="2800" dirty="0" smtClean="0">
+              <a:rPr lang="en-US" sz="2800" dirty="0">
                 <a:solidFill>
                   <a:schemeClr val="tx1"/>
                 </a:solidFill>
@@ -6101,7 +6104,7 @@
           <a:p>
             <a:pPr algn="ctr"/>
             <a:r>
-              <a:rPr lang="en-US" sz="3200" b="1" dirty="0" smtClean="0">
+              <a:rPr lang="en-US" sz="3200" b="1" dirty="0">
                 <a:latin typeface="Times New Roman" panose="02020603050405020304" pitchFamily="18" charset="0"/>
                 <a:ea typeface="ＭＳ Ｐゴシック" pitchFamily="1" charset="-128"/>
                 <a:cs typeface="Times New Roman" panose="02020603050405020304" pitchFamily="18" charset="0"/>
@@ -6117,10 +6120,10 @@
           <p:cNvPr id="4" name="Oval 3" descr="Your startup LOGO">
             <a:extLst>
               <a:ext uri="{FF2B5EF4-FFF2-40B4-BE49-F238E27FC236}">
-                <a16:creationId xmlns="" xmlns:a16="http://schemas.microsoft.com/office/drawing/2014/main" xmlns:lc="http://schemas.openxmlformats.org/drawingml/2006/lockedCanvas" id="{5DBCE864-823D-4A13-9607-5DA1F0ED5FB8}"/>
+                <a16:creationId xmlns:a16="http://schemas.microsoft.com/office/drawing/2014/main" id="{5DBCE864-823D-4A13-9607-5DA1F0ED5FB8}"/>
               </a:ext>
               <a:ext uri="{C183D7F6-B498-43B3-948B-1728B52AA6E4}">
-                <adec:decorative xmlns:adec="http://schemas.microsoft.com/office/drawing/2017/decorative" xmlns="" xmlns:lc="http://schemas.openxmlformats.org/drawingml/2006/lockedCanvas" val="0"/>
+                <adec:decorative xmlns:adec="http://schemas.microsoft.com/office/drawing/2017/decorative" val="0"/>
               </a:ext>
             </a:extLst>
           </p:cNvPr>
@@ -6280,14 +6283,14 @@
           <a:p>
             <a:pPr algn="ctr"/>
             <a:r>
-              <a:rPr lang="en-US" dirty="0" smtClean="0"/>
+              <a:rPr lang="en-US" dirty="0"/>
               <a:t>Team</a:t>
             </a:r>
           </a:p>
           <a:p>
             <a:pPr algn="ctr"/>
             <a:r>
-              <a:rPr lang="en-US" sz="1200" b="1" dirty="0" smtClean="0"/>
+              <a:rPr lang="en-US" sz="1200" b="1" dirty="0"/>
               <a:t>AquaMind</a:t>
             </a:r>
             <a:endParaRPr lang="en-IN" sz="1200" b="1" dirty="0"/>
@@ -6378,20 +6381,30 @@
           </a:p>
           <a:p>
             <a:r>
-              <a:rPr lang="en-US" b="1" dirty="0" smtClean="0">
+              <a:rPr lang="en-US" b="1" dirty="0">
                 <a:solidFill>
                   <a:schemeClr val="tx1"/>
                 </a:solidFill>
               </a:rPr>
-              <a:t>1.Water </a:t>
-            </a:r>
+              <a:t>1.Water Conservation </a:t>
+            </a:r>
+            <a:r>
+              <a:rPr lang="en-US" dirty="0">
+                <a:solidFill>
+                  <a:schemeClr val="tx1"/>
+                </a:solidFill>
+              </a:rPr>
+              <a:t>– Reduces unnecessary water usage through precise irrigation.</a:t>
+            </a:r>
+          </a:p>
+          <a:p>
             <a:r>
               <a:rPr lang="en-US" b="1" dirty="0">
                 <a:solidFill>
                   <a:schemeClr val="tx1"/>
                 </a:solidFill>
               </a:rPr>
-              <a:t>Conservation </a:t>
+              <a:t>2.Higher Crop Productivity </a:t>
             </a:r>
             <a:r>
               <a:rPr lang="en-US" dirty="0">
@@ -6399,77 +6412,35 @@
                   <a:schemeClr val="tx1"/>
                 </a:solidFill>
               </a:rPr>
-              <a:t>– Reduces unnecessary water usage through precise irrigation.</a:t>
-            </a:r>
-          </a:p>
-          <a:p>
-            <a:r>
-              <a:rPr lang="en-US" b="1" dirty="0" smtClean="0">
+              <a:t>– Provides crops with the right amount of water at the right time.</a:t>
+            </a:r>
+          </a:p>
+          <a:p>
+            <a:r>
+              <a:rPr lang="en-US" b="1" dirty="0">
                 <a:solidFill>
                   <a:schemeClr val="tx1"/>
                 </a:solidFill>
               </a:rPr>
-              <a:t>2.Higher </a:t>
-            </a:r>
+              <a:t>3.Sustainable Farming </a:t>
+            </a:r>
+            <a:r>
+              <a:rPr lang="en-US" dirty="0">
+                <a:solidFill>
+                  <a:schemeClr val="tx1"/>
+                </a:solidFill>
+              </a:rPr>
+              <a:t>– Promotes efficient use of water and other agricultural resources.</a:t>
+            </a:r>
+          </a:p>
+          <a:p>
             <a:r>
               <a:rPr lang="en-US" b="1" dirty="0">
                 <a:solidFill>
                   <a:schemeClr val="tx1"/>
                 </a:solidFill>
               </a:rPr>
-              <a:t>Crop Productivity </a:t>
-            </a:r>
-            <a:r>
-              <a:rPr lang="en-US" dirty="0">
-                <a:solidFill>
-                  <a:schemeClr val="tx1"/>
-                </a:solidFill>
-              </a:rPr>
-              <a:t>– Provides crops with the right amount of water at the right time.</a:t>
-            </a:r>
-          </a:p>
-          <a:p>
-            <a:r>
-              <a:rPr lang="en-US" b="1" dirty="0" smtClean="0">
-                <a:solidFill>
-                  <a:schemeClr val="tx1"/>
-                </a:solidFill>
-              </a:rPr>
-              <a:t>3.Sustainable </a:t>
-            </a:r>
-            <a:r>
-              <a:rPr lang="en-US" b="1" dirty="0">
-                <a:solidFill>
-                  <a:schemeClr val="tx1"/>
-                </a:solidFill>
-              </a:rPr>
-              <a:t>Farming </a:t>
-            </a:r>
-            <a:r>
-              <a:rPr lang="en-US" dirty="0">
-                <a:solidFill>
-                  <a:schemeClr val="tx1"/>
-                </a:solidFill>
-              </a:rPr>
-              <a:t>– Promotes efficient use of water and other agricultural resources.</a:t>
-            </a:r>
-          </a:p>
-          <a:p>
-            <a:r>
-              <a:rPr lang="en-US" b="1" dirty="0" smtClean="0">
-                <a:solidFill>
-                  <a:schemeClr val="tx1"/>
-                </a:solidFill>
-              </a:rPr>
-              <a:t>4.Climate </a:t>
-            </a:r>
-            <a:r>
-              <a:rPr lang="en-US" b="1" dirty="0">
-                <a:solidFill>
-                  <a:schemeClr val="tx1"/>
-                </a:solidFill>
-              </a:rPr>
-              <a:t>Adaptability </a:t>
+              <a:t>4.Climate Adaptability </a:t>
             </a:r>
             <a:r>
               <a:rPr lang="en-US" dirty="0">
@@ -6532,7 +6503,7 @@
           </a:p>
           <a:p>
             <a:r>
-              <a:rPr lang="en-US" b="1" dirty="0" smtClean="0">
+              <a:rPr lang="en-US" b="1" dirty="0">
                 <a:solidFill>
                   <a:schemeClr val="tx1">
                     <a:lumMod val="95000"/>
@@ -6540,10 +6511,10 @@
                   </a:schemeClr>
                 </a:solidFill>
               </a:rPr>
-              <a:t>1.Automatic </a:t>
-            </a:r>
-            <a:r>
-              <a:rPr lang="en-US" b="1" dirty="0">
+              <a:t>1.Automatic Irrigation </a:t>
+            </a:r>
+            <a:r>
+              <a:rPr lang="en-US" dirty="0">
                 <a:solidFill>
                   <a:schemeClr val="tx1">
                     <a:lumMod val="95000"/>
@@ -6551,10 +6522,12 @@
                   </a:schemeClr>
                 </a:solidFill>
               </a:rPr>
-              <a:t>Irrigation </a:t>
-            </a:r>
-            <a:r>
-              <a:rPr lang="en-US" dirty="0">
+              <a:t>– Reduces the need for manual control of water pumps.</a:t>
+            </a:r>
+          </a:p>
+          <a:p>
+            <a:r>
+              <a:rPr lang="en-US" b="1" dirty="0">
                 <a:solidFill>
                   <a:schemeClr val="tx1">
                     <a:lumMod val="95000"/>
@@ -6562,12 +6535,10 @@
                   </a:schemeClr>
                 </a:solidFill>
               </a:rPr>
-              <a:t>– Reduces the need for manual control of water pumps.</a:t>
-            </a:r>
-          </a:p>
-          <a:p>
-            <a:r>
-              <a:rPr lang="en-US" b="1" dirty="0" smtClean="0">
+              <a:t>2.Real-Time Monitoring </a:t>
+            </a:r>
+            <a:r>
+              <a:rPr lang="en-US" dirty="0">
                 <a:solidFill>
                   <a:schemeClr val="tx1">
                     <a:lumMod val="95000"/>
@@ -6575,8 +6546,10 @@
                   </a:schemeClr>
                 </a:solidFill>
               </a:rPr>
-              <a:t>2.Real-Time </a:t>
-            </a:r>
+              <a:t>– Farmers can monitor soil moisture, temperature, humidity and irrigation status remotely.</a:t>
+            </a:r>
+          </a:p>
+          <a:p>
             <a:r>
               <a:rPr lang="en-US" b="1" dirty="0">
                 <a:solidFill>
@@ -6586,7 +6559,7 @@
                   </a:schemeClr>
                 </a:solidFill>
               </a:rPr>
-              <a:t>Monitoring </a:t>
+              <a:t>3.Cost Reduction </a:t>
             </a:r>
             <a:r>
               <a:rPr lang="en-US" dirty="0">
@@ -6597,12 +6570,12 @@
                   </a:schemeClr>
                 </a:solidFill>
               </a:rPr>
-              <a:t>– Farmers can monitor soil moisture, temperature, humidity and irrigation status remotely.</a:t>
-            </a:r>
-          </a:p>
-          <a:p>
-            <a:r>
-              <a:rPr lang="en-US" b="1" dirty="0" smtClean="0">
+              <a:t>– Saves water, electricity and labor costs</a:t>
+            </a:r>
+          </a:p>
+          <a:p>
+            <a:r>
+              <a:rPr lang="en-US" b="1" dirty="0">
                 <a:solidFill>
                   <a:schemeClr val="tx1">
                     <a:lumMod val="95000"/>
@@ -6610,53 +6583,7 @@
                   </a:schemeClr>
                 </a:solidFill>
               </a:rPr>
-              <a:t>3.Cost </a:t>
-            </a:r>
-            <a:r>
-              <a:rPr lang="en-US" b="1" dirty="0">
-                <a:solidFill>
-                  <a:schemeClr val="tx1">
-                    <a:lumMod val="95000"/>
-                    <a:lumOff val="5000"/>
-                  </a:schemeClr>
-                </a:solidFill>
-              </a:rPr>
-              <a:t>Reduction </a:t>
-            </a:r>
-            <a:r>
-              <a:rPr lang="en-US" dirty="0">
-                <a:solidFill>
-                  <a:schemeClr val="tx1">
-                    <a:lumMod val="95000"/>
-                    <a:lumOff val="5000"/>
-                  </a:schemeClr>
-                </a:solidFill>
-              </a:rPr>
-              <a:t>– Saves water, electricity and labor costs</a:t>
-            </a:r>
-          </a:p>
-          <a:p>
-            <a:r>
-              <a:rPr lang="en-US" b="1" dirty="0" smtClean="0">
-                <a:solidFill>
-                  <a:schemeClr val="tx1">
-                    <a:lumMod val="95000"/>
-                    <a:lumOff val="5000"/>
-                  </a:schemeClr>
-                </a:solidFill>
-              </a:rPr>
-              <a:t>4.Smart </a:t>
-            </a:r>
-            <a:r>
-              <a:rPr lang="en-US" b="1" dirty="0">
-                <a:solidFill>
-                  <a:schemeClr val="tx1">
-                    <a:lumMod val="95000"/>
-                    <a:lumOff val="5000"/>
-                  </a:schemeClr>
-                </a:solidFill>
-              </a:rPr>
-              <a:t>Decision Making </a:t>
+              <a:t>4.Smart Decision Making </a:t>
             </a:r>
             <a:r>
               <a:rPr lang="en-US" dirty="0">
@@ -6996,7 +6923,7 @@
           <a:p>
             <a:pPr algn="ctr"/>
             <a:r>
-              <a:rPr lang="en-US" sz="3200" b="1" dirty="0" smtClean="0">
+              <a:rPr lang="en-US" sz="3200" b="1" dirty="0">
                 <a:latin typeface="Times New Roman" panose="02020603050405020304" pitchFamily="18" charset="0"/>
                 <a:ea typeface="ＭＳ Ｐゴシック" pitchFamily="1" charset="-128"/>
                 <a:cs typeface="Times New Roman" panose="02020603050405020304" pitchFamily="18" charset="0"/>
@@ -7033,7 +6960,7 @@
               <a:buNone/>
             </a:pPr>
             <a:r>
-              <a:rPr lang="en-US" sz="2000" b="1" dirty="0" smtClean="0"/>
+              <a:rPr lang="en-US" sz="2000" b="1" dirty="0"/>
               <a:t>1.Problem statement : </a:t>
             </a:r>
           </a:p>
@@ -7043,21 +6970,21 @@
             </a:pPr>
             <a:r>
               <a:rPr lang="en-US" sz="2000" dirty="0"/>
-              <a:t>“The problem was identified through real-world observations and interactions with farmers, where we observed water wastage caused by irrigation based on fixed schedules rather than actual soil and weather conditions</a:t>
-            </a:r>
-            <a:r>
-              <a:rPr lang="en-US" sz="2000" dirty="0" smtClean="0"/>
-              <a:t>.”</a:t>
-            </a:r>
-            <a:endParaRPr lang="en-US" sz="2000" b="1" dirty="0" smtClean="0"/>
+              <a:t>“The problem was identified through real-world observations and interactions with farmers, where we observed water wastage caused by irrigation based on fixed schedules rather than actual soil and weather conditions.”</a:t>
+            </a:r>
+            <a:endParaRPr lang="en-US" sz="2000" b="1" dirty="0"/>
           </a:p>
           <a:p>
             <a:pPr marL="0" indent="0">
               <a:buNone/>
             </a:pPr>
             <a:r>
-              <a:rPr lang="en-IN" sz="2000" dirty="0" smtClean="0"/>
-              <a:t>2. Ali</a:t>
+              <a:rPr lang="en-IN" sz="2000" dirty="0"/>
+              <a:t>2. Ali, </a:t>
+            </a:r>
+            <a:r>
+              <a:rPr lang="en-IN" sz="2000" dirty="0" err="1"/>
+              <a:t>Awais</a:t>
             </a:r>
             <a:r>
               <a:rPr lang="en-IN" sz="2000" dirty="0"/>
@@ -7065,14 +6992,6 @@
             </a:r>
             <a:r>
               <a:rPr lang="en-IN" sz="2000" dirty="0" err="1"/>
-              <a:t>Awais</a:t>
-            </a:r>
-            <a:r>
-              <a:rPr lang="en-IN" sz="2000" dirty="0"/>
-              <a:t>, </a:t>
-            </a:r>
-            <a:r>
-              <a:rPr lang="en-IN" sz="2000" dirty="0" err="1"/>
               <a:t>Tajamul</a:t>
             </a:r>
             <a:r>
@@ -7109,19 +7028,7 @@
             </a:r>
             <a:r>
               <a:rPr lang="en-IN" sz="2000" dirty="0"/>
-              <a:t> 7.4 </a:t>
-            </a:r>
-            <a:r>
-              <a:rPr lang="en-IN" sz="2000" dirty="0" smtClean="0"/>
-              <a:t>(2025):106. [</a:t>
-            </a:r>
-            <a:r>
-              <a:rPr lang="en-IN" sz="2000" dirty="0"/>
-              <a:t>https://</a:t>
-            </a:r>
-            <a:r>
-              <a:rPr lang="en-IN" sz="2000" dirty="0" smtClean="0"/>
-              <a:t>www.mdpi.com/2624-7402/7/4/106]</a:t>
+              <a:t> 7.4 (2025):106. [https://www.mdpi.com/2624-7402/7/4/106]</a:t>
             </a:r>
           </a:p>
           <a:p>
@@ -7129,11 +7036,11 @@
               <a:buNone/>
             </a:pPr>
             <a:r>
-              <a:rPr lang="en-IN" sz="2000" dirty="0" smtClean="0"/>
+              <a:rPr lang="en-IN" sz="2000" dirty="0"/>
               <a:t>3. </a:t>
             </a:r>
             <a:r>
-              <a:rPr lang="en-IN" sz="2000" dirty="0" err="1" smtClean="0"/>
+              <a:rPr lang="en-IN" sz="2000" dirty="0" err="1"/>
               <a:t>Blessy</a:t>
             </a:r>
             <a:r>
@@ -7157,7 +7064,7 @@
               <a:t>." 2021 Third International Conference on Intelligent Communication Technologies and Virtual Mobile </a:t>
             </a:r>
             <a:r>
-              <a:rPr lang="en-IN" sz="2000" dirty="0" err="1" smtClean="0"/>
+              <a:rPr lang="en-IN" sz="2000" dirty="0" err="1"/>
               <a:t>Networ</a:t>
             </a:r>
             <a:r>
@@ -7165,30 +7072,21 @@
               <a:t>): </a:t>
             </a:r>
             <a:r>
-              <a:rPr lang="en-IN" sz="2000" dirty="0" err="1" smtClean="0"/>
+              <a:rPr lang="en-IN" sz="2000" dirty="0" err="1"/>
               <a:t>ks</a:t>
             </a:r>
             <a:r>
-              <a:rPr lang="en-IN" sz="2000" dirty="0" smtClean="0"/>
-              <a:t> </a:t>
-            </a:r>
-            <a:r>
               <a:rPr lang="en-IN" sz="2000" dirty="0"/>
-              <a:t>(ICICV). IEEE, 2021.[https://ieeexplore.ieee.org/abstract/document/9388444/]</a:t>
-            </a:r>
-            <a:endParaRPr lang="en-IN" sz="2000" dirty="0" smtClean="0"/>
+              <a:t> (ICICV). IEEE, 2021.[https://ieeexplore.ieee.org/abstract/document/9388444/]</a:t>
+            </a:r>
           </a:p>
           <a:p>
             <a:pPr marL="0" indent="0">
               <a:buNone/>
             </a:pPr>
             <a:r>
-              <a:rPr lang="en-IN" sz="2000" dirty="0" smtClean="0"/>
-              <a:t>4.Kaushik</a:t>
-            </a:r>
-            <a:r>
               <a:rPr lang="en-IN" sz="2000" dirty="0"/>
-              <a:t>, </a:t>
+              <a:t>4.Kaushik, </a:t>
             </a:r>
             <a:r>
               <a:rPr lang="en-IN" sz="2000" dirty="0" err="1"/>
@@ -7198,32 +7096,30 @@
               <a:rPr lang="en-IN" sz="2000" dirty="0"/>
               <a:t>, and Karan Singh. "AI-driven smart irrigation and resource optimization for sustainable precision agriculture." Europe 250 (2025): 70.[https://www.jsiar.com/2025-May/JSIAR-M-25-05444.pdf]</a:t>
             </a:r>
-            <a:endParaRPr lang="en-IN" sz="2000" dirty="0" smtClean="0"/>
           </a:p>
           <a:p>
             <a:pPr marL="0" indent="0">
               <a:buNone/>
             </a:pPr>
             <a:r>
-              <a:rPr lang="en-US" sz="2000" dirty="0" smtClean="0"/>
+              <a:rPr lang="en-US" sz="2000" dirty="0"/>
               <a:t>5. </a:t>
             </a:r>
             <a:r>
-              <a:rPr lang="en-US" sz="2000" dirty="0" err="1" smtClean="0"/>
+              <a:rPr lang="en-US" sz="2000" dirty="0" err="1"/>
               <a:t>ChatGPT</a:t>
             </a:r>
             <a:r>
-              <a:rPr lang="en-US" sz="2000" dirty="0" smtClean="0"/>
+              <a:rPr lang="en-US" sz="2000" dirty="0"/>
               <a:t>.</a:t>
             </a:r>
-            <a:endParaRPr lang="en-US" sz="2000" dirty="0" smtClean="0"/>
           </a:p>
           <a:p>
             <a:pPr marL="0" indent="0">
               <a:buNone/>
             </a:pPr>
             <a:r>
-              <a:rPr lang="en-US" sz="2000" dirty="0" smtClean="0"/>
+              <a:rPr lang="en-US" sz="2000" dirty="0"/>
               <a:t>6. Perplexity.</a:t>
             </a:r>
           </a:p>
@@ -7239,47 +7135,31 @@
               <a:rPr lang="en-US" sz="2000" dirty="0">
                 <a:hlinkClick r:id="rId2"/>
               </a:rPr>
-              <a:t>https://</a:t>
-            </a:r>
-            <a:r>
-              <a:rPr lang="en-US" sz="2000" dirty="0" smtClean="0">
-                <a:hlinkClick r:id="rId2"/>
-              </a:rPr>
-              <a:t>youtu.be/pOB8-pi796I?si=WMq0YsQifSBO8Xcs</a:t>
-            </a:r>
-            <a:endParaRPr lang="en-US" sz="2000" dirty="0" smtClean="0"/>
+              <a:t>https://youtu.be/pOB8-pi796I?si=WMq0YsQifSBO8Xcs</a:t>
+            </a:r>
+            <a:endParaRPr lang="en-US" sz="2000" dirty="0"/>
           </a:p>
           <a:p>
             <a:pPr marL="0" indent="0">
               <a:buNone/>
             </a:pPr>
             <a:r>
-              <a:rPr lang="en-US" sz="2000" dirty="0" smtClean="0"/>
-              <a:t>8</a:t>
-            </a:r>
-            <a:r>
               <a:rPr lang="en-US" sz="2000" dirty="0"/>
-              <a:t>. </a:t>
+              <a:t>8. </a:t>
             </a:r>
             <a:r>
               <a:rPr lang="en-US" sz="2000" dirty="0">
                 <a:hlinkClick r:id="rId3"/>
               </a:rPr>
-              <a:t>https://</a:t>
-            </a:r>
-            <a:r>
-              <a:rPr lang="en-US" sz="2000" dirty="0" smtClean="0">
-                <a:hlinkClick r:id="rId3"/>
-              </a:rPr>
-              <a:t>www.codechef.com/learn/course/python</a:t>
-            </a:r>
-            <a:endParaRPr lang="en-US" sz="2000" dirty="0" smtClean="0"/>
+              <a:t>https://www.codechef.com/learn/course/python</a:t>
+            </a:r>
+            <a:endParaRPr lang="en-US" sz="2000" dirty="0"/>
           </a:p>
           <a:p>
             <a:pPr marL="0" indent="0">
               <a:buNone/>
             </a:pPr>
-            <a:endParaRPr lang="en-US" sz="2000" dirty="0" smtClean="0"/>
+            <a:endParaRPr lang="en-US" sz="2000" dirty="0"/>
           </a:p>
           <a:p>
             <a:pPr marL="0" indent="0">
@@ -7294,10 +7174,10 @@
           <p:cNvPr id="4" name="Oval 3" descr="Your startup LOGO">
             <a:extLst>
               <a:ext uri="{FF2B5EF4-FFF2-40B4-BE49-F238E27FC236}">
-                <a16:creationId xmlns="" xmlns:a16="http://schemas.microsoft.com/office/drawing/2014/main" xmlns:lc="http://schemas.openxmlformats.org/drawingml/2006/lockedCanvas" id="{5DBCE864-823D-4A13-9607-5DA1F0ED5FB8}"/>
+                <a16:creationId xmlns:a16="http://schemas.microsoft.com/office/drawing/2014/main" id="{5DBCE864-823D-4A13-9607-5DA1F0ED5FB8}"/>
               </a:ext>
               <a:ext uri="{C183D7F6-B498-43B3-948B-1728B52AA6E4}">
-                <adec:decorative xmlns:adec="http://schemas.microsoft.com/office/drawing/2017/decorative" xmlns="" xmlns:lc="http://schemas.openxmlformats.org/drawingml/2006/lockedCanvas" val="0"/>
+                <adec:decorative xmlns:adec="http://schemas.microsoft.com/office/drawing/2017/decorative" val="0"/>
               </a:ext>
             </a:extLst>
           </p:cNvPr>
@@ -7457,14 +7337,14 @@
           <a:p>
             <a:pPr algn="ctr"/>
             <a:r>
-              <a:rPr lang="en-US" dirty="0" smtClean="0"/>
+              <a:rPr lang="en-US" dirty="0"/>
               <a:t>Team</a:t>
             </a:r>
           </a:p>
           <a:p>
             <a:pPr algn="ctr"/>
             <a:r>
-              <a:rPr lang="en-US" sz="1200" b="1" dirty="0" smtClean="0"/>
+              <a:rPr lang="en-US" sz="1200" b="1" dirty="0"/>
               <a:t>AquaMind</a:t>
             </a:r>
             <a:endParaRPr lang="en-IN" sz="1200" b="1" dirty="0"/>
